--- a/Software Design/24. WebAssembly.pptx
+++ b/Software Design/24. WebAssembly.pptx
@@ -5,7 +5,7 @@
     <p:sldMasterId id="2147483708" r:id="rId1"/>
   </p:sldMasterIdLst>
   <p:notesMasterIdLst>
-    <p:notesMasterId r:id="rId11"/>
+    <p:notesMasterId r:id="rId13"/>
   </p:notesMasterIdLst>
   <p:sldIdLst>
     <p:sldId id="256" r:id="rId2"/>
@@ -16,7 +16,9 @@
     <p:sldId id="624" r:id="rId7"/>
     <p:sldId id="626" r:id="rId8"/>
     <p:sldId id="625" r:id="rId9"/>
-    <p:sldId id="343" r:id="rId10"/>
+    <p:sldId id="627" r:id="rId10"/>
+    <p:sldId id="628" r:id="rId11"/>
+    <p:sldId id="343" r:id="rId12"/>
   </p:sldIdLst>
   <p:sldSz cx="9144000" cy="6858000" type="screen4x3"/>
   <p:notesSz cx="6858000" cy="9144000"/>
@@ -4023,6 +4025,221 @@
 </p:sld>
 </file>
 
+<file path=ppt/slides/slide10.xml><?xml version="1.0" encoding="utf-8"?>
+<p:sld xmlns:a="http://schemas.openxmlformats.org/drawingml/2006/main" xmlns:r="http://schemas.openxmlformats.org/officeDocument/2006/relationships" xmlns:p="http://schemas.openxmlformats.org/presentationml/2006/main">
+  <p:cSld>
+    <p:spTree>
+      <p:nvGrpSpPr>
+        <p:cNvPr id="1" name=""/>
+        <p:cNvGrpSpPr/>
+        <p:nvPr/>
+      </p:nvGrpSpPr>
+      <p:grpSpPr>
+        <a:xfrm>
+          <a:off x="0" y="0"/>
+          <a:ext cx="0" cy="0"/>
+          <a:chOff x="0" y="0"/>
+          <a:chExt cx="0" cy="0"/>
+        </a:xfrm>
+      </p:grpSpPr>
+      <p:sp>
+        <p:nvSpPr>
+          <p:cNvPr id="2" name="Title 1"/>
+          <p:cNvSpPr>
+            <a:spLocks noGrp="1"/>
+          </p:cNvSpPr>
+          <p:nvPr>
+            <p:ph type="title"/>
+          </p:nvPr>
+        </p:nvSpPr>
+        <p:spPr/>
+        <p:txBody>
+          <a:bodyPr/>
+          <a:lstStyle/>
+          <a:p>
+            <a:r>
+              <a:rPr lang="en-US" smtClean="0"/>
+              <a:t>Security Model</a:t>
+            </a:r>
+            <a:endParaRPr lang="en-US" dirty="0"/>
+          </a:p>
+        </p:txBody>
+      </p:sp>
+      <p:pic>
+        <p:nvPicPr>
+          <p:cNvPr id="4099" name="Picture 3"/>
+          <p:cNvPicPr>
+            <a:picLocks noChangeAspect="1" noChangeArrowheads="1"/>
+          </p:cNvPicPr>
+          <p:nvPr/>
+        </p:nvPicPr>
+        <p:blipFill>
+          <a:blip r:embed="rId2" cstate="print"/>
+          <a:srcRect/>
+          <a:stretch>
+            <a:fillRect/>
+          </a:stretch>
+        </p:blipFill>
+        <p:spPr bwMode="auto">
+          <a:xfrm>
+            <a:off x="1066800" y="1981200"/>
+            <a:ext cx="6702425" cy="2755900"/>
+          </a:xfrm>
+          <a:prstGeom prst="rect">
+            <a:avLst/>
+          </a:prstGeom>
+          <a:noFill/>
+          <a:ln w="9525">
+            <a:noFill/>
+            <a:miter lim="800000"/>
+            <a:headEnd/>
+            <a:tailEnd/>
+          </a:ln>
+        </p:spPr>
+      </p:pic>
+      <p:sp>
+        <p:nvSpPr>
+          <p:cNvPr id="7" name="Rectangle 6"/>
+          <p:cNvSpPr/>
+          <p:nvPr/>
+        </p:nvSpPr>
+        <p:spPr>
+          <a:xfrm>
+            <a:off x="1447800" y="5029200"/>
+            <a:ext cx="6019800" cy="646331"/>
+          </a:xfrm>
+          <a:prstGeom prst="rect">
+            <a:avLst/>
+          </a:prstGeom>
+        </p:spPr>
+        <p:txBody>
+          <a:bodyPr wrap="square">
+            <a:spAutoFit/>
+          </a:bodyPr>
+          <a:lstStyle/>
+          <a:p>
+            <a:pPr algn="ctr"/>
+            <a:r>
+              <a:rPr lang="en-US" dirty="0" smtClean="0"/>
+              <a:t>A native (traditional) application </a:t>
+            </a:r>
+            <a:r>
+              <a:rPr lang="en-US" dirty="0" smtClean="0"/>
+              <a:t>security model </a:t>
+            </a:r>
+            <a:r>
+              <a:rPr lang="en-US" dirty="0" smtClean="0"/>
+              <a:t>versus </a:t>
+            </a:r>
+            <a:r>
+              <a:rPr lang="en-US" dirty="0" err="1" smtClean="0"/>
+              <a:t>Wasm’s</a:t>
+            </a:r>
+            <a:r>
+              <a:rPr lang="en-US" dirty="0" smtClean="0"/>
+              <a:t> </a:t>
+            </a:r>
+            <a:r>
+              <a:rPr lang="en-US" dirty="0" smtClean="0"/>
+              <a:t>capability-based security model.</a:t>
+            </a:r>
+            <a:endParaRPr lang="en-US" dirty="0"/>
+          </a:p>
+        </p:txBody>
+      </p:sp>
+    </p:spTree>
+  </p:cSld>
+  <p:clrMapOvr>
+    <a:masterClrMapping/>
+  </p:clrMapOvr>
+</p:sld>
+</file>
+
+<file path=ppt/slides/slide11.xml><?xml version="1.0" encoding="utf-8"?>
+<p:sld xmlns:a="http://schemas.openxmlformats.org/drawingml/2006/main" xmlns:r="http://schemas.openxmlformats.org/officeDocument/2006/relationships" xmlns:p="http://schemas.openxmlformats.org/presentationml/2006/main">
+  <p:cSld>
+    <p:spTree>
+      <p:nvGrpSpPr>
+        <p:cNvPr id="1" name=""/>
+        <p:cNvGrpSpPr/>
+        <p:nvPr/>
+      </p:nvGrpSpPr>
+      <p:grpSpPr>
+        <a:xfrm>
+          <a:off x="0" y="0"/>
+          <a:ext cx="0" cy="0"/>
+          <a:chOff x="0" y="0"/>
+          <a:chExt cx="0" cy="0"/>
+        </a:xfrm>
+      </p:grpSpPr>
+      <p:sp>
+        <p:nvSpPr>
+          <p:cNvPr id="18434" name="Title 1"/>
+          <p:cNvSpPr>
+            <a:spLocks noGrp="1"/>
+          </p:cNvSpPr>
+          <p:nvPr>
+            <p:ph type="title"/>
+          </p:nvPr>
+        </p:nvSpPr>
+        <p:spPr/>
+        <p:txBody>
+          <a:bodyPr/>
+          <a:lstStyle/>
+          <a:p>
+            <a:pPr eaLnBrk="1" hangingPunct="1"/>
+            <a:r>
+              <a:rPr lang="en-US" dirty="0" smtClean="0"/>
+              <a:t>Thank You &amp; See </a:t>
+            </a:r>
+            <a:r>
+              <a:rPr lang="en-US" smtClean="0"/>
+              <a:t>You Again</a:t>
+            </a:r>
+            <a:endParaRPr lang="en-US" dirty="0" smtClean="0"/>
+          </a:p>
+        </p:txBody>
+      </p:sp>
+      <p:pic>
+        <p:nvPicPr>
+          <p:cNvPr id="5" name="Content Placeholder 4"/>
+          <p:cNvPicPr>
+            <a:picLocks noGrp="1" noChangeAspect="1" noChangeArrowheads="1"/>
+          </p:cNvPicPr>
+          <p:nvPr>
+            <p:ph idx="1"/>
+          </p:nvPr>
+        </p:nvPicPr>
+        <p:blipFill>
+          <a:blip r:embed="rId2" cstate="print"/>
+          <a:srcRect/>
+          <a:stretch>
+            <a:fillRect/>
+          </a:stretch>
+        </p:blipFill>
+        <p:spPr>
+          <a:xfrm>
+            <a:off x="1143000" y="1676400"/>
+            <a:ext cx="6810375" cy="4525963"/>
+          </a:xfrm>
+          <a:noFill/>
+        </p:spPr>
+      </p:pic>
+    </p:spTree>
+  </p:cSld>
+  <p:clrMapOvr>
+    <a:masterClrMapping/>
+  </p:clrMapOvr>
+  <p:timing>
+    <p:tnLst>
+      <p:par>
+        <p:cTn id="1" dur="indefinite" restart="never" nodeType="tmRoot"/>
+      </p:par>
+    </p:tnLst>
+  </p:timing>
+</p:sld>
+</file>
+
 <file path=ppt/slides/slide2.xml><?xml version="1.0" encoding="utf-8"?>
 <p:sld xmlns:a="http://schemas.openxmlformats.org/drawingml/2006/main" xmlns:r="http://schemas.openxmlformats.org/officeDocument/2006/relationships" xmlns:p="http://schemas.openxmlformats.org/presentationml/2006/main">
   <p:cSld>
@@ -5196,7 +5413,7 @@
       </p:grpSpPr>
       <p:sp>
         <p:nvSpPr>
-          <p:cNvPr id="18434" name="Title 1"/>
+          <p:cNvPr id="2" name="Title 1"/>
           <p:cNvSpPr>
             <a:spLocks noGrp="1"/>
           </p:cNvSpPr>
@@ -5209,28 +5426,103 @@
           <a:bodyPr/>
           <a:lstStyle/>
           <a:p>
-            <a:pPr eaLnBrk="1" hangingPunct="1"/>
             <a:r>
               <a:rPr lang="en-US" dirty="0" smtClean="0"/>
-              <a:t>Thank You &amp; See </a:t>
-            </a:r>
-            <a:r>
-              <a:rPr lang="en-US" smtClean="0"/>
-              <a:t>You Again</a:t>
-            </a:r>
-            <a:endParaRPr lang="en-US" dirty="0" smtClean="0"/>
+              <a:t>Java </a:t>
+            </a:r>
+            <a:r>
+              <a:rPr lang="en-US" dirty="0" smtClean="0"/>
+              <a:t>and </a:t>
+            </a:r>
+            <a:r>
+              <a:rPr lang="en-US" dirty="0" err="1" smtClean="0"/>
+              <a:t>Wasm</a:t>
+            </a:r>
+            <a:endParaRPr lang="en-US" dirty="0"/>
+          </a:p>
+        </p:txBody>
+      </p:sp>
+      <p:sp>
+        <p:nvSpPr>
+          <p:cNvPr id="3" name="Content Placeholder 2"/>
+          <p:cNvSpPr>
+            <a:spLocks noGrp="1"/>
+          </p:cNvSpPr>
+          <p:nvPr>
+            <p:ph idx="1"/>
+          </p:nvPr>
+        </p:nvSpPr>
+        <p:spPr>
+          <a:xfrm>
+            <a:off x="457200" y="1600200"/>
+            <a:ext cx="4191000" cy="4525963"/>
+          </a:xfrm>
+        </p:spPr>
+        <p:txBody>
+          <a:bodyPr/>
+          <a:lstStyle/>
+          <a:p>
+            <a:r>
+              <a:rPr lang="en-US" sz="2400" dirty="0" smtClean="0"/>
+              <a:t>Unlike the JVM, which requires a heavyweight </a:t>
+            </a:r>
+            <a:r>
+              <a:rPr lang="en-US" sz="2400" dirty="0" smtClean="0"/>
+              <a:t>VM, </a:t>
+            </a:r>
+            <a:r>
+              <a:rPr lang="en-US" sz="2400" dirty="0" err="1" smtClean="0"/>
+              <a:t>Wasm’s</a:t>
+            </a:r>
+            <a:r>
+              <a:rPr lang="en-US" sz="2400" dirty="0" smtClean="0"/>
+              <a:t> </a:t>
+            </a:r>
+            <a:r>
+              <a:rPr lang="en-US" sz="2400" dirty="0" smtClean="0"/>
+              <a:t>design avoids the need for a complex execution </a:t>
+            </a:r>
+            <a:r>
+              <a:rPr lang="en-US" sz="2400" dirty="0" smtClean="0"/>
+              <a:t>environment.</a:t>
+            </a:r>
+          </a:p>
+          <a:p>
+            <a:r>
+              <a:rPr lang="en-US" sz="2400" dirty="0" err="1" smtClean="0"/>
+              <a:t>Wasm</a:t>
+            </a:r>
+            <a:r>
+              <a:rPr lang="en-US" sz="2400" dirty="0" smtClean="0"/>
+              <a:t> is an open standard developed </a:t>
+            </a:r>
+            <a:r>
+              <a:rPr lang="en-US" sz="2400" dirty="0" smtClean="0"/>
+              <a:t>through the </a:t>
+            </a:r>
+            <a:r>
+              <a:rPr lang="en-US" sz="2400" dirty="0" smtClean="0"/>
+              <a:t>W3C with </a:t>
+            </a:r>
+            <a:r>
+              <a:rPr lang="en-US" sz="2400" dirty="0" smtClean="0"/>
+              <a:t>multivendor collaboration</a:t>
+            </a:r>
+            <a:r>
+              <a:rPr lang="en-US" sz="2400" dirty="0" smtClean="0"/>
+              <a:t>; it is not controlled by any single company.</a:t>
+            </a:r>
+            <a:endParaRPr lang="en-US" sz="2400" dirty="0"/>
           </a:p>
         </p:txBody>
       </p:sp>
       <p:pic>
         <p:nvPicPr>
-          <p:cNvPr id="5" name="Content Placeholder 4"/>
+          <p:cNvPr id="3075" name="Picture 3"/>
           <p:cNvPicPr>
-            <a:picLocks noGrp="1" noChangeAspect="1" noChangeArrowheads="1"/>
+            <a:picLocks noChangeAspect="1" noChangeArrowheads="1"/>
           </p:cNvPicPr>
-          <p:nvPr>
-            <p:ph idx="1"/>
-          </p:nvPr>
+          <p:nvPr/>
         </p:nvPicPr>
         <p:blipFill>
           <a:blip r:embed="rId2" cstate="print"/>
@@ -5239,12 +5531,21 @@
             <a:fillRect/>
           </a:stretch>
         </p:blipFill>
-        <p:spPr>
+        <p:spPr bwMode="auto">
           <a:xfrm>
-            <a:off x="1143000" y="1676400"/>
-            <a:ext cx="6810375" cy="4525963"/>
+            <a:off x="4800600" y="1676400"/>
+            <a:ext cx="3762375" cy="4356100"/>
           </a:xfrm>
+          <a:prstGeom prst="rect">
+            <a:avLst/>
+          </a:prstGeom>
           <a:noFill/>
+          <a:ln w="9525">
+            <a:noFill/>
+            <a:miter lim="800000"/>
+            <a:headEnd/>
+            <a:tailEnd/>
+          </a:ln>
         </p:spPr>
       </p:pic>
     </p:spTree>
@@ -5252,13 +5553,6 @@
   <p:clrMapOvr>
     <a:masterClrMapping/>
   </p:clrMapOvr>
-  <p:timing>
-    <p:tnLst>
-      <p:par>
-        <p:cTn id="1" dur="indefinite" restart="never" nodeType="tmRoot"/>
-      </p:par>
-    </p:tnLst>
-  </p:timing>
 </p:sld>
 </file>
 
